--- a/curso/pptx/S61.pptx
+++ b/curso/pptx/S61.pptx
@@ -472,426 +472,6 @@
     </a:lvl9pPr>
   </p:notesStyle>
 </p:notesMaster>
-</file>
-
-<file path=ppt/notesSlides/notesSlide1.xml><?xml version="1.0" encoding="utf-8"?>
-<p:notes xmlns:a="http://schemas.openxmlformats.org/drawingml/2006/main" xmlns:p="http://schemas.openxmlformats.org/presentationml/2006/main" xmlns:r="http://schemas.openxmlformats.org/officeDocument/2006/relationships">
-  <p:cSld>
-    <p:spTree>
-      <p:nvGrpSpPr>
-        <p:cNvPr id="1" name=""/>
-        <p:cNvGrpSpPr/>
-        <p:nvPr/>
-      </p:nvGrpSpPr>
-      <p:grpSpPr>
-        <a:xfrm>
-          <a:off x="0" y="0"/>
-          <a:ext cx="0" cy="0"/>
-          <a:chOff x="0" y="0"/>
-          <a:chExt cx="0" cy="0"/>
-        </a:xfrm>
-      </p:grpSpPr>
-      <p:sp>
-        <p:nvSpPr>
-          <p:cNvPr id="2" name="Slide Image Placeholder 1"/>
-          <p:cNvSpPr>
-            <a:spLocks noGrp="1"/>
-          </p:cNvSpPr>
-          <p:nvPr>
-            <p:ph type="sldImg" idx="2"/>
-          </p:nvPr>
-        </p:nvSpPr>
-        <p:spPr/>
-      </p:sp>
-      <p:sp>
-        <p:nvSpPr>
-          <p:cNvPr id="3" name="Notes Placeholder 2"/>
-          <p:cNvSpPr>
-            <a:spLocks noGrp="1"/>
-          </p:cNvSpPr>
-          <p:nvPr>
-            <p:ph type="body" idx="3" sz="quarter"/>
-          </p:nvPr>
-        </p:nvSpPr>
-        <p:spPr/>
-        <p:txBody>
-          <a:bodyPr/>
-          <a:lstStyle/>
-          <a:p>
-            <a:r>
-              <a:t>3 minutos. Sin apuntes. Es para recordar, no cuenta para nota.</a:t>
-            </a:r>
-          </a:p>
-        </p:txBody>
-      </p:sp>
-      <p:sp>
-        <p:nvSpPr>
-          <p:cNvPr id="4" name="Slide Number Placeholder 3"/>
-          <p:cNvSpPr>
-            <a:spLocks noGrp="1"/>
-          </p:cNvSpPr>
-          <p:nvPr>
-            <p:ph type="sldNum" idx="5" sz="quarter"/>
-          </p:nvPr>
-        </p:nvSpPr>
-        <p:spPr/>
-      </p:sp>
-    </p:spTree>
-  </p:cSld>
-  <p:clrMapOvr>
-    <a:masterClrMapping/>
-  </p:clrMapOvr>
-</p:notes>
-</file>
-
-<file path=ppt/notesSlides/notesSlide2.xml><?xml version="1.0" encoding="utf-8"?>
-<p:notes xmlns:a="http://schemas.openxmlformats.org/drawingml/2006/main" xmlns:p="http://schemas.openxmlformats.org/presentationml/2006/main" xmlns:r="http://schemas.openxmlformats.org/officeDocument/2006/relationships">
-  <p:cSld>
-    <p:spTree>
-      <p:nvGrpSpPr>
-        <p:cNvPr id="1" name=""/>
-        <p:cNvGrpSpPr/>
-        <p:nvPr/>
-      </p:nvGrpSpPr>
-      <p:grpSpPr>
-        <a:xfrm>
-          <a:off x="0" y="0"/>
-          <a:ext cx="0" cy="0"/>
-          <a:chOff x="0" y="0"/>
-          <a:chExt cx="0" cy="0"/>
-        </a:xfrm>
-      </p:grpSpPr>
-      <p:sp>
-        <p:nvSpPr>
-          <p:cNvPr id="2" name="Slide Image Placeholder 1"/>
-          <p:cNvSpPr>
-            <a:spLocks noGrp="1"/>
-          </p:cNvSpPr>
-          <p:nvPr>
-            <p:ph type="sldImg" idx="2"/>
-          </p:nvPr>
-        </p:nvSpPr>
-        <p:spPr/>
-      </p:sp>
-      <p:sp>
-        <p:nvSpPr>
-          <p:cNvPr id="3" name="Notes Placeholder 2"/>
-          <p:cNvSpPr>
-            <a:spLocks noGrp="1"/>
-          </p:cNvSpPr>
-          <p:nvPr>
-            <p:ph type="body" idx="3" sz="quarter"/>
-          </p:nvPr>
-        </p:nvSpPr>
-        <p:spPr/>
-        <p:txBody>
-          <a:bodyPr/>
-          <a:lstStyle/>
-          <a:p>
-            <a:r>
-              <a:t>3 minutos. Sin apuntes. Es para recordar, no cuenta para nota.</a:t>
-            </a:r>
-          </a:p>
-        </p:txBody>
-      </p:sp>
-      <p:sp>
-        <p:nvSpPr>
-          <p:cNvPr id="4" name="Slide Number Placeholder 3"/>
-          <p:cNvSpPr>
-            <a:spLocks noGrp="1"/>
-          </p:cNvSpPr>
-          <p:nvPr>
-            <p:ph type="sldNum" idx="5" sz="quarter"/>
-          </p:nvPr>
-        </p:nvSpPr>
-        <p:spPr/>
-      </p:sp>
-    </p:spTree>
-  </p:cSld>
-  <p:clrMapOvr>
-    <a:masterClrMapping/>
-  </p:clrMapOvr>
-</p:notes>
-</file>
-
-<file path=ppt/notesSlides/notesSlide3.xml><?xml version="1.0" encoding="utf-8"?>
-<p:notes xmlns:a="http://schemas.openxmlformats.org/drawingml/2006/main" xmlns:p="http://schemas.openxmlformats.org/presentationml/2006/main" xmlns:r="http://schemas.openxmlformats.org/officeDocument/2006/relationships">
-  <p:cSld>
-    <p:spTree>
-      <p:nvGrpSpPr>
-        <p:cNvPr id="1" name=""/>
-        <p:cNvGrpSpPr/>
-        <p:nvPr/>
-      </p:nvGrpSpPr>
-      <p:grpSpPr>
-        <a:xfrm>
-          <a:off x="0" y="0"/>
-          <a:ext cx="0" cy="0"/>
-          <a:chOff x="0" y="0"/>
-          <a:chExt cx="0" cy="0"/>
-        </a:xfrm>
-      </p:grpSpPr>
-      <p:sp>
-        <p:nvSpPr>
-          <p:cNvPr id="2" name="Slide Image Placeholder 1"/>
-          <p:cNvSpPr>
-            <a:spLocks noGrp="1"/>
-          </p:cNvSpPr>
-          <p:nvPr>
-            <p:ph type="sldImg" idx="2"/>
-          </p:nvPr>
-        </p:nvSpPr>
-        <p:spPr/>
-      </p:sp>
-      <p:sp>
-        <p:nvSpPr>
-          <p:cNvPr id="3" name="Notes Placeholder 2"/>
-          <p:cNvSpPr>
-            <a:spLocks noGrp="1"/>
-          </p:cNvSpPr>
-          <p:nvPr>
-            <p:ph type="body" idx="3" sz="quarter"/>
-          </p:nvPr>
-        </p:nvSpPr>
-        <p:spPr/>
-        <p:txBody>
-          <a:bodyPr/>
-          <a:lstStyle/>
-          <a:p>
-            <a:r>
-              <a:t>Nadie tiene que contestar: solo pensarlo.</a:t>
-            </a:r>
-          </a:p>
-        </p:txBody>
-      </p:sp>
-      <p:sp>
-        <p:nvSpPr>
-          <p:cNvPr id="4" name="Slide Number Placeholder 3"/>
-          <p:cNvSpPr>
-            <a:spLocks noGrp="1"/>
-          </p:cNvSpPr>
-          <p:nvPr>
-            <p:ph type="sldNum" idx="5" sz="quarter"/>
-          </p:nvPr>
-        </p:nvSpPr>
-        <p:spPr/>
-      </p:sp>
-    </p:spTree>
-  </p:cSld>
-  <p:clrMapOvr>
-    <a:masterClrMapping/>
-  </p:clrMapOvr>
-</p:notes>
-</file>
-
-<file path=ppt/notesSlides/notesSlide4.xml><?xml version="1.0" encoding="utf-8"?>
-<p:notes xmlns:a="http://schemas.openxmlformats.org/drawingml/2006/main" xmlns:p="http://schemas.openxmlformats.org/presentationml/2006/main" xmlns:r="http://schemas.openxmlformats.org/officeDocument/2006/relationships">
-  <p:cSld>
-    <p:spTree>
-      <p:nvGrpSpPr>
-        <p:cNvPr id="1" name=""/>
-        <p:cNvGrpSpPr/>
-        <p:nvPr/>
-      </p:nvGrpSpPr>
-      <p:grpSpPr>
-        <a:xfrm>
-          <a:off x="0" y="0"/>
-          <a:ext cx="0" cy="0"/>
-          <a:chOff x="0" y="0"/>
-          <a:chExt cx="0" cy="0"/>
-        </a:xfrm>
-      </p:grpSpPr>
-      <p:sp>
-        <p:nvSpPr>
-          <p:cNvPr id="2" name="Slide Image Placeholder 1"/>
-          <p:cNvSpPr>
-            <a:spLocks noGrp="1"/>
-          </p:cNvSpPr>
-          <p:nvPr>
-            <p:ph type="sldImg" idx="2"/>
-          </p:nvPr>
-        </p:nvSpPr>
-        <p:spPr/>
-      </p:sp>
-      <p:sp>
-        <p:nvSpPr>
-          <p:cNvPr id="3" name="Notes Placeholder 2"/>
-          <p:cNvSpPr>
-            <a:spLocks noGrp="1"/>
-          </p:cNvSpPr>
-          <p:nvPr>
-            <p:ph type="body" idx="3" sz="quarter"/>
-          </p:nvPr>
-        </p:nvSpPr>
-        <p:spPr/>
-        <p:txBody>
-          <a:bodyPr/>
-          <a:lstStyle/>
-          <a:p>
-            <a:r>
-              <a:t>Dejar unos segundos para que piensen la respuesta fácil antes de enseñar los pasos.</a:t>
-            </a:r>
-          </a:p>
-        </p:txBody>
-      </p:sp>
-      <p:sp>
-        <p:nvSpPr>
-          <p:cNvPr id="4" name="Slide Number Placeholder 3"/>
-          <p:cNvSpPr>
-            <a:spLocks noGrp="1"/>
-          </p:cNvSpPr>
-          <p:nvPr>
-            <p:ph type="sldNum" idx="5" sz="quarter"/>
-          </p:nvPr>
-        </p:nvSpPr>
-        <p:spPr/>
-      </p:sp>
-    </p:spTree>
-  </p:cSld>
-  <p:clrMapOvr>
-    <a:masterClrMapping/>
-  </p:clrMapOvr>
-</p:notes>
-</file>
-
-<file path=ppt/notesSlides/notesSlide5.xml><?xml version="1.0" encoding="utf-8"?>
-<p:notes xmlns:a="http://schemas.openxmlformats.org/drawingml/2006/main" xmlns:p="http://schemas.openxmlformats.org/presentationml/2006/main" xmlns:r="http://schemas.openxmlformats.org/officeDocument/2006/relationships">
-  <p:cSld>
-    <p:spTree>
-      <p:nvGrpSpPr>
-        <p:cNvPr id="1" name=""/>
-        <p:cNvGrpSpPr/>
-        <p:nvPr/>
-      </p:nvGrpSpPr>
-      <p:grpSpPr>
-        <a:xfrm>
-          <a:off x="0" y="0"/>
-          <a:ext cx="0" cy="0"/>
-          <a:chOff x="0" y="0"/>
-          <a:chExt cx="0" cy="0"/>
-        </a:xfrm>
-      </p:grpSpPr>
-      <p:sp>
-        <p:nvSpPr>
-          <p:cNvPr id="2" name="Slide Image Placeholder 1"/>
-          <p:cNvSpPr>
-            <a:spLocks noGrp="1"/>
-          </p:cNvSpPr>
-          <p:nvPr>
-            <p:ph type="sldImg" idx="2"/>
-          </p:nvPr>
-        </p:nvSpPr>
-        <p:spPr/>
-      </p:sp>
-      <p:sp>
-        <p:nvSpPr>
-          <p:cNvPr id="3" name="Notes Placeholder 2"/>
-          <p:cNvSpPr>
-            <a:spLocks noGrp="1"/>
-          </p:cNvSpPr>
-          <p:nvPr>
-            <p:ph type="body" idx="3" sz="quarter"/>
-          </p:nvPr>
-        </p:nvSpPr>
-        <p:spPr/>
-        <p:txBody>
-          <a:bodyPr/>
-          <a:lstStyle/>
-          <a:p>
-            <a:r>
-              <a:t>Dejar 2 minutos para que lo escriban. La diapositiva siguiente muestra el resumen.</a:t>
-            </a:r>
-          </a:p>
-        </p:txBody>
-      </p:sp>
-      <p:sp>
-        <p:nvSpPr>
-          <p:cNvPr id="4" name="Slide Number Placeholder 3"/>
-          <p:cNvSpPr>
-            <a:spLocks noGrp="1"/>
-          </p:cNvSpPr>
-          <p:nvPr>
-            <p:ph type="sldNum" idx="5" sz="quarter"/>
-          </p:nvPr>
-        </p:nvSpPr>
-        <p:spPr/>
-      </p:sp>
-    </p:spTree>
-  </p:cSld>
-  <p:clrMapOvr>
-    <a:masterClrMapping/>
-  </p:clrMapOvr>
-</p:notes>
-</file>
-
-<file path=ppt/notesSlides/notesSlide6.xml><?xml version="1.0" encoding="utf-8"?>
-<p:notes xmlns:a="http://schemas.openxmlformats.org/drawingml/2006/main" xmlns:p="http://schemas.openxmlformats.org/presentationml/2006/main" xmlns:r="http://schemas.openxmlformats.org/officeDocument/2006/relationships">
-  <p:cSld>
-    <p:spTree>
-      <p:nvGrpSpPr>
-        <p:cNvPr id="1" name=""/>
-        <p:cNvGrpSpPr/>
-        <p:nvPr/>
-      </p:nvGrpSpPr>
-      <p:grpSpPr>
-        <a:xfrm>
-          <a:off x="0" y="0"/>
-          <a:ext cx="0" cy="0"/>
-          <a:chOff x="0" y="0"/>
-          <a:chExt cx="0" cy="0"/>
-        </a:xfrm>
-      </p:grpSpPr>
-      <p:sp>
-        <p:nvSpPr>
-          <p:cNvPr id="2" name="Slide Image Placeholder 1"/>
-          <p:cNvSpPr>
-            <a:spLocks noGrp="1"/>
-          </p:cNvSpPr>
-          <p:nvPr>
-            <p:ph type="sldImg" idx="2"/>
-          </p:nvPr>
-        </p:nvSpPr>
-        <p:spPr/>
-      </p:sp>
-      <p:sp>
-        <p:nvSpPr>
-          <p:cNvPr id="3" name="Notes Placeholder 2"/>
-          <p:cNvSpPr>
-            <a:spLocks noGrp="1"/>
-          </p:cNvSpPr>
-          <p:nvPr>
-            <p:ph type="body" idx="3" sz="quarter"/>
-          </p:nvPr>
-        </p:nvSpPr>
-        <p:spPr/>
-        <p:txBody>
-          <a:bodyPr/>
-          <a:lstStyle/>
-          <a:p>
-            <a:r>
-              <a:t>Buscar: «diferencia entre discutir y dialogar» · «cómo dialogar sin pelear adolescentes»</a:t>
-            </a:r>
-          </a:p>
-        </p:txBody>
-      </p:sp>
-      <p:sp>
-        <p:nvSpPr>
-          <p:cNvPr id="4" name="Slide Number Placeholder 3"/>
-          <p:cNvSpPr>
-            <a:spLocks noGrp="1"/>
-          </p:cNvSpPr>
-          <p:nvPr>
-            <p:ph type="sldNum" idx="5" sz="quarter"/>
-          </p:nvPr>
-        </p:nvSpPr>
-        <p:spPr/>
-      </p:sp>
-    </p:spTree>
-  </p:cSld>
-  <p:clrMapOvr>
-    <a:masterClrMapping/>
-  </p:clrMapOvr>
-</p:notes>
 </file>
 
 <file path=ppt/slideLayouts/slideLayout1.xml><?xml version="1.0" encoding="utf-8"?>

--- a/curso/pptx/S61.pptx
+++ b/curso/pptx/S61.pptx
@@ -3800,7 +3800,7 @@
                 </a:solidFill>
                 <a:latin typeface="Nunito Sans"/>
               </a:rPr>
-              <a:t>Iker: «Los deberes ayudan a repasar. ¿Tú por qué piensas que no?». Naiara: «En casa no tengo tiempo ni un sitio tranquilo». Iker: «Vale. ¿Y si fueran voluntarios?».</a:t>
+              <a:t>Un chico: «Los deberes ayudan a repasar. ¿Tú por qué piensas que no?». Una chica: «En casa no tengo tiempo ni un sitio tranquilo». El chico: «Vale. ¿Y si fueran voluntarios?».</a:t>
             </a:r>
           </a:p>
         </p:txBody>
@@ -3873,7 +3873,7 @@
                 </a:solidFill>
                 <a:latin typeface="Nunito Sans"/>
               </a:rPr>
-              <a:t>¿Se escuchan? Sí: Iker pregunta por la razón de Naiara y la tiene en cuenta.</a:t>
+              <a:t>¿Se escuchan? Sí: el chico pregunta por la razón de la chica y la tiene en cuenta.</a:t>
             </a:r>
           </a:p>
           <a:p>
@@ -4109,7 +4109,7 @@
                 </a:solidFill>
                 <a:latin typeface="Nunito Sans"/>
               </a:rPr>
-              <a:t>Omar: «Quedamos en el Arenal». Maialen: «Mejor en Moyúa». Omar: «Que no, en el Arenal». Maialen: «Moyúa, y punto». Así, cuarenta mensajes.</a:t>
+              <a:t>Un chico: «Quedamos en el Arenal». Una chica: «Mejor en Moyúa». El chico: «Que no, en el Arenal». La chica: «Moyúa, y punto». Así, cuarenta mensajes.</a:t>
             </a:r>
           </a:p>
         </p:txBody>
@@ -4418,7 +4418,7 @@
                 </a:solidFill>
                 <a:latin typeface="Nunito Sans"/>
               </a:rPr>
-              <a:t>Yasmin y Dylan hablan del uniforme escolar. Se escuchan, dan razones y descubren cosas nuevas. Al final siguen sin estar de acuerdo.</a:t>
+              <a:t>Una chica y un chico hablan del uniforme escolar. Se escuchan, dan razones y descubren cosas nuevas. Al final siguen sin estar de acuerdo.</a:t>
             </a:r>
           </a:p>
         </p:txBody>
@@ -7243,7 +7243,7 @@
                           </a:solidFill>
                           <a:latin typeface="Nunito Sans"/>
                         </a:rPr>
-                        <a:t>«¡Eres un vago!» «¡Y tú un pelota!»</a:t>
+                        <a:t>«¡Eres un vago!» «¡Y tú un plasta!»</a:t>
                       </a:r>
                     </a:p>
                   </a:txBody>

--- a/curso/pptx/S61.pptx
+++ b/curso/pptx/S61.pptx
@@ -6111,7 +6111,7 @@
                 </a:solidFill>
                 <a:latin typeface="Nunito Sans"/>
               </a:rPr>
-              <a:t>Emocionar no es manipular: el problema es usar la emoción en ______ de razones.  (sesión 49)</a:t>
+              <a:t>Juzgar a alguien entero por un solo ______ es el efecto halo.  (sesión 49)</a:t>
             </a:r>
           </a:p>
         </p:txBody>
@@ -6349,7 +6349,7 @@
                 </a:solidFill>
                 <a:latin typeface="Nunito Sans"/>
               </a:rPr>
-              <a:t>Emocionar no es manipular: el problema es usar la emoción en </a:t>
+              <a:t>Juzgar a alguien entero por un solo </a:t>
             </a:r>
             <a:r>
               <a:rPr sz="2600" b="1">
@@ -6358,7 +6358,7 @@
                 </a:solidFill>
                 <a:latin typeface="Nunito Sans"/>
               </a:rPr>
-              <a:t>lugar</a:t>
+              <a:t>rasgo</a:t>
             </a:r>
             <a:r>
               <a:rPr sz="2600" b="0">
@@ -6367,7 +6367,7 @@
                 </a:solidFill>
                 <a:latin typeface="Nunito Sans"/>
               </a:rPr>
-              <a:t> de razones.  (sesión 49)</a:t>
+              <a:t> es el efecto halo.  (sesión 49)</a:t>
             </a:r>
           </a:p>
         </p:txBody>
